--- a/dist/초6/사회·역사/현대사회와평화/초6_사회·역사_현대사회와평화_03_분단과평화통일.pptx
+++ b/dist/초6/사회·역사/현대사회와평화/초6_사회·역사_현대사회와평화_03_분단과평화통일.pptx
@@ -122,13 +122,13 @@
   <p:extLst>
     <p:ext uri="{521415D9-36F7-43E2-AB2F-B90AF26B5E84}">
       <p14:sectionLst xmlns:p14="http://schemas.microsoft.com/office/powerpoint/2010/main">
-        <p14:section name="도입" id="{65fb99b0-b254-ac80-2905-1e10294656c2}">
+        <p14:section name="도입" id="{3cc0473b-ed70-709d-6bb5-5d0b0272a8c3}">
           <p14:sldIdLst>
             <p14:sldId id="256"/>
             <p14:sldId id="257"/>
           </p14:sldIdLst>
         </p14:section>
-        <p14:section name="개념" id="{964cc337-702e-4d7c-0f70-bbd6d7a77dad}">
+        <p14:section name="개념" id="{c6e88ec5-012e-03d0-a6e4-cacb5ebc656d}">
           <p14:sldIdLst>
             <p14:sldId id="258"/>
             <p14:sldId id="259"/>
@@ -137,7 +137,7 @@
             <p14:sldId id="265"/>
           </p14:sldIdLst>
         </p14:section>
-        <p14:section name="연습" id="{9d689290-6cca-ca6b-6ed4-b2cdebccbbed}">
+        <p14:section name="연습" id="{d32e09ae-04bb-341a-61a9-04d0bad361f0}">
           <p14:sldIdLst>
             <p14:sldId id="261"/>
             <p14:sldId id="262"/>
@@ -146,30 +146,30 @@
             <p14:sldId id="267"/>
           </p14:sldIdLst>
         </p14:section>
-        <p14:section name="개념" id="{0b77dc1e-7ef3-cd2e-5eee-81ba7a5b27cd}">
+        <p14:section name="개념" id="{103ac220-d3e1-58f6-bc2c-c31b3bcc926b}">
           <p14:sldIdLst/>
         </p14:section>
-        <p14:section name="연습" id="{01a3beb6-fc7a-c515-f6b4-6873eff1b771}">
+        <p14:section name="연습" id="{45cd96b2-19d9-361f-24c8-d11891293cc1}">
           <p14:sldIdLst/>
         </p14:section>
-        <p14:section name="개념" id="{d1142019-7de6-fe68-c6f1-17312a6e67ae}">
+        <p14:section name="개념" id="{73f06543-e766-70de-924a-ceee5cc032c8}">
           <p14:sldIdLst/>
         </p14:section>
-        <p14:section name="연습" id="{e16aa9a5-4ddd-a0c0-77e0-5a5b9074b18b}">
+        <p14:section name="연습" id="{c737e063-8c18-b7c6-15f4-df1805c412b0}">
           <p14:sldIdLst/>
         </p14:section>
-        <p14:section name="확인" id="{e45692d8-4949-df18-ef1d-702e37c75a89}">
+        <p14:section name="확인" id="{02126e71-4afb-82ec-6bb2-45e8ccec347b}">
           <p14:sldIdLst>
             <p14:sldId id="268"/>
             <p14:sldId id="269"/>
           </p14:sldIdLst>
         </p14:section>
-        <p14:section name="정리" id="{4ca201b4-e0f1-8322-842a-4c5f36f085aa}">
+        <p14:section name="정리" id="{d891ac70-d9f6-0e6f-2a9d-3404ba114eb5}">
           <p14:sldIdLst>
             <p14:sldId id="270"/>
           </p14:sldIdLst>
         </p14:section>
-        <p14:section name="보충" id="{75c4d1dc-0944-10ff-9323-baf086b1b4a6}">
+        <p14:section name="보충" id="{fb4159cc-d753-0c60-4bfb-a687c7cf3737}">
           <p14:sldIdLst>
             <p14:sldId id="271"/>
           </p14:sldIdLst>
